--- a/dist/초4/영어/이해와상호작용/초4_영어_이해와상호작용_03_시각묻고답하기_학생용.pptx
+++ b/dist/초4/영어/이해와상호작용/초4_영어_이해와상호작용_03_시각묻고답하기_학생용.pptx
@@ -119,20 +119,20 @@
   <p:extLst>
     <p:ext uri="{521415D9-36F7-43E2-AB2F-B90AF26B5E84}">
       <p14:sectionLst xmlns:p14="http://schemas.microsoft.com/office/powerpoint/2010/main">
-        <p14:section name="도입" id="{c5b3fd42-c44a-12fd-06b7-8e127eaebeee}">
+        <p14:section name="도입" id="{fae19020-43a4-b559-8d48-67c8afb46003}">
           <p14:sldIdLst>
             <p14:sldId id="256"/>
             <p14:sldId id="257"/>
           </p14:sldIdLst>
         </p14:section>
-        <p14:section name="개념" id="{a64cb6af-4d13-86a3-55b0-7c87cdd08f5c}">
+        <p14:section name="개념" id="{7d9919d0-bd68-e61d-e9ef-053d91921890}">
           <p14:sldIdLst>
             <p14:sldId id="258"/>
             <p14:sldId id="259"/>
             <p14:sldId id="260"/>
           </p14:sldIdLst>
         </p14:section>
-        <p14:section name="연습" id="{d6ef8994-cfcb-33f5-29bd-bdb04dae0c6c}">
+        <p14:section name="연습" id="{afbbb50a-b01c-18fe-a98c-cab03e29ff19}">
           <p14:sldIdLst>
             <p14:sldId id="261"/>
             <p14:sldId id="262"/>
@@ -140,18 +140,18 @@
             <p14:sldId id="264"/>
           </p14:sldIdLst>
         </p14:section>
-        <p14:section name="확인" id="{aca8b776-73ee-13c4-e5f3-55b49be5211d}">
+        <p14:section name="확인" id="{281706cc-847b-94f7-43b8-6d884c309bdf}">
           <p14:sldIdLst>
             <p14:sldId id="265"/>
             <p14:sldId id="266"/>
           </p14:sldIdLst>
         </p14:section>
-        <p14:section name="정리" id="{112300ea-15d6-a75d-b6a6-1d56683c860c}">
+        <p14:section name="정리" id="{c3b1d22b-ed6d-2f7a-f8df-0e68a78672ee}">
           <p14:sldIdLst>
             <p14:sldId id="267"/>
           </p14:sldIdLst>
         </p14:section>
-        <p14:section name="보충" id="{be0a8f8e-caeb-8236-ab52-107b7f464314}">
+        <p14:section name="보충" id="{68b96a44-622c-5d82-2b0d-51808c4403c5}">
           <p14:sldIdLst>
             <p14:sldId id="268"/>
           </p14:sldIdLst>
